--- a/files/CS449/CS_0449_Recitation_5.pptx
+++ b/files/CS449/CS_0449_Recitation_5.pptx
@@ -5,7 +5,7 @@
     <p:sldMasterId id="2147483670" r:id="rId1"/>
   </p:sldMasterIdLst>
   <p:notesMasterIdLst>
-    <p:notesMasterId r:id="rId30"/>
+    <p:notesMasterId r:id="rId32"/>
   </p:notesMasterIdLst>
   <p:sldIdLst>
     <p:sldId id="256" r:id="rId2"/>
@@ -35,7 +35,9 @@
     <p:sldId id="322" r:id="rId26"/>
     <p:sldId id="323" r:id="rId27"/>
     <p:sldId id="324" r:id="rId28"/>
-    <p:sldId id="325" r:id="rId29"/>
+    <p:sldId id="327" r:id="rId29"/>
+    <p:sldId id="328" r:id="rId30"/>
+    <p:sldId id="325" r:id="rId31"/>
   </p:sldIdLst>
   <p:sldSz cx="12192000" cy="6858000"/>
   <p:notesSz cx="6858000" cy="9144000"/>
@@ -12378,6 +12380,324 @@
 <file path=ppt/slides/slide28.xml><?xml version="1.0" encoding="utf-8"?>
 <p:sld xmlns:a="http://schemas.openxmlformats.org/drawingml/2006/main" xmlns:r="http://schemas.openxmlformats.org/officeDocument/2006/relationships" xmlns:p="http://schemas.openxmlformats.org/presentationml/2006/main">
   <p:cSld>
+    <p:spTree>
+      <p:nvGrpSpPr>
+        <p:cNvPr id="1" name=""/>
+        <p:cNvGrpSpPr/>
+        <p:nvPr/>
+      </p:nvGrpSpPr>
+      <p:grpSpPr>
+        <a:xfrm>
+          <a:off x="0" y="0"/>
+          <a:ext cx="0" cy="0"/>
+          <a:chOff x="0" y="0"/>
+          <a:chExt cx="0" cy="0"/>
+        </a:xfrm>
+      </p:grpSpPr>
+      <p:sp>
+        <p:nvSpPr>
+          <p:cNvPr id="2" name="Title 1">
+            <a:extLst>
+              <a:ext uri="{FF2B5EF4-FFF2-40B4-BE49-F238E27FC236}">
+                <a16:creationId xmlns:a16="http://schemas.microsoft.com/office/drawing/2014/main" id="{CD0F5C5F-4AAE-42AB-9B02-71F10ADE208F}"/>
+              </a:ext>
+            </a:extLst>
+          </p:cNvPr>
+          <p:cNvSpPr>
+            <a:spLocks noGrp="1"/>
+          </p:cNvSpPr>
+          <p:nvPr>
+            <p:ph type="title"/>
+          </p:nvPr>
+        </p:nvSpPr>
+        <p:spPr/>
+        <p:txBody>
+          <a:bodyPr/>
+          <a:lstStyle/>
+          <a:p>
+            <a:r>
+              <a:rPr lang="en-US" dirty="0"/>
+              <a:t>Basic Visual Algorithm </a:t>
+            </a:r>
+          </a:p>
+        </p:txBody>
+      </p:sp>
+      <p:pic>
+        <p:nvPicPr>
+          <p:cNvPr id="4" name="Picture 3" descr="A close up of text on a whiteboard&#10;&#10;Description automatically generated">
+            <a:extLst>
+              <a:ext uri="{FF2B5EF4-FFF2-40B4-BE49-F238E27FC236}">
+                <a16:creationId xmlns:a16="http://schemas.microsoft.com/office/drawing/2014/main" id="{F0A4506B-4912-4587-BA1F-3DAE947F6EB3}"/>
+              </a:ext>
+            </a:extLst>
+          </p:cNvPr>
+          <p:cNvPicPr>
+            <a:picLocks noChangeAspect="1"/>
+          </p:cNvPicPr>
+          <p:nvPr/>
+        </p:nvPicPr>
+        <p:blipFill>
+          <a:blip r:embed="rId2"/>
+          <a:stretch>
+            <a:fillRect/>
+          </a:stretch>
+        </p:blipFill>
+        <p:spPr>
+          <a:xfrm>
+            <a:off x="3512326" y="2469884"/>
+            <a:ext cx="5012550" cy="3759412"/>
+          </a:xfrm>
+          <a:prstGeom prst="rect">
+            <a:avLst/>
+          </a:prstGeom>
+        </p:spPr>
+      </p:pic>
+    </p:spTree>
+    <p:extLst>
+      <p:ext uri="{BB962C8B-B14F-4D97-AF65-F5344CB8AC3E}">
+        <p14:creationId xmlns:p14="http://schemas.microsoft.com/office/powerpoint/2010/main" val="2729897725"/>
+      </p:ext>
+    </p:extLst>
+  </p:cSld>
+  <p:clrMapOvr>
+    <a:masterClrMapping/>
+  </p:clrMapOvr>
+</p:sld>
+</file>
+
+<file path=ppt/slides/slide29.xml><?xml version="1.0" encoding="utf-8"?>
+<p:sld xmlns:a="http://schemas.openxmlformats.org/drawingml/2006/main" xmlns:r="http://schemas.openxmlformats.org/officeDocument/2006/relationships" xmlns:p="http://schemas.openxmlformats.org/presentationml/2006/main">
+  <p:cSld>
+    <p:spTree>
+      <p:nvGrpSpPr>
+        <p:cNvPr id="1" name=""/>
+        <p:cNvGrpSpPr/>
+        <p:nvPr/>
+      </p:nvGrpSpPr>
+      <p:grpSpPr>
+        <a:xfrm>
+          <a:off x="0" y="0"/>
+          <a:ext cx="0" cy="0"/>
+          <a:chOff x="0" y="0"/>
+          <a:chExt cx="0" cy="0"/>
+        </a:xfrm>
+      </p:grpSpPr>
+      <p:sp>
+        <p:nvSpPr>
+          <p:cNvPr id="2" name="Title 1">
+            <a:extLst>
+              <a:ext uri="{FF2B5EF4-FFF2-40B4-BE49-F238E27FC236}">
+                <a16:creationId xmlns:a16="http://schemas.microsoft.com/office/drawing/2014/main" id="{79F45195-720F-40C1-BF44-41DEAB8EC322}"/>
+              </a:ext>
+            </a:extLst>
+          </p:cNvPr>
+          <p:cNvSpPr>
+            <a:spLocks noGrp="1"/>
+          </p:cNvSpPr>
+          <p:nvPr>
+            <p:ph type="title"/>
+          </p:nvPr>
+        </p:nvSpPr>
+        <p:spPr/>
+        <p:txBody>
+          <a:bodyPr/>
+          <a:lstStyle/>
+          <a:p>
+            <a:r>
+              <a:rPr lang="en-US" dirty="0"/>
+              <a:t>Basic Algorithm </a:t>
+            </a:r>
+            <a:r>
+              <a:rPr lang="en-US"/>
+              <a:t>in Pseudocode</a:t>
+            </a:r>
+          </a:p>
+        </p:txBody>
+      </p:sp>
+      <p:pic>
+        <p:nvPicPr>
+          <p:cNvPr id="4" name="Picture 3" descr="A close up of text on a whiteboard&#10;&#10;Description automatically generated">
+            <a:extLst>
+              <a:ext uri="{FF2B5EF4-FFF2-40B4-BE49-F238E27FC236}">
+                <a16:creationId xmlns:a16="http://schemas.microsoft.com/office/drawing/2014/main" id="{EEECE935-A6A9-4421-B947-82A4D1E566CE}"/>
+              </a:ext>
+            </a:extLst>
+          </p:cNvPr>
+          <p:cNvPicPr>
+            <a:picLocks noChangeAspect="1"/>
+          </p:cNvPicPr>
+          <p:nvPr/>
+        </p:nvPicPr>
+        <p:blipFill>
+          <a:blip r:embed="rId2"/>
+          <a:stretch>
+            <a:fillRect/>
+          </a:stretch>
+        </p:blipFill>
+        <p:spPr>
+          <a:xfrm>
+            <a:off x="3764678" y="2504525"/>
+            <a:ext cx="4662644" cy="3496983"/>
+          </a:xfrm>
+          <a:prstGeom prst="rect">
+            <a:avLst/>
+          </a:prstGeom>
+        </p:spPr>
+      </p:pic>
+    </p:spTree>
+    <p:extLst>
+      <p:ext uri="{BB962C8B-B14F-4D97-AF65-F5344CB8AC3E}">
+        <p14:creationId xmlns:p14="http://schemas.microsoft.com/office/powerpoint/2010/main" val="4199305788"/>
+      </p:ext>
+    </p:extLst>
+  </p:cSld>
+  <p:clrMapOvr>
+    <a:masterClrMapping/>
+  </p:clrMapOvr>
+</p:sld>
+</file>
+
+<file path=ppt/slides/slide3.xml><?xml version="1.0" encoding="utf-8"?>
+<p:sld xmlns:a="http://schemas.openxmlformats.org/drawingml/2006/main" xmlns:r="http://schemas.openxmlformats.org/officeDocument/2006/relationships" xmlns:p="http://schemas.openxmlformats.org/presentationml/2006/main">
+  <p:cSld>
+    <p:spTree>
+      <p:nvGrpSpPr>
+        <p:cNvPr id="1" name=""/>
+        <p:cNvGrpSpPr/>
+        <p:nvPr/>
+      </p:nvGrpSpPr>
+      <p:grpSpPr>
+        <a:xfrm>
+          <a:off x="0" y="0"/>
+          <a:ext cx="0" cy="0"/>
+          <a:chOff x="0" y="0"/>
+          <a:chExt cx="0" cy="0"/>
+        </a:xfrm>
+      </p:grpSpPr>
+      <p:sp>
+        <p:nvSpPr>
+          <p:cNvPr id="2" name="Title 1">
+            <a:extLst>
+              <a:ext uri="{FF2B5EF4-FFF2-40B4-BE49-F238E27FC236}">
+                <a16:creationId xmlns:a16="http://schemas.microsoft.com/office/drawing/2014/main" id="{3A5B0D9C-36C9-4F34-A141-C3F7500BAE08}"/>
+              </a:ext>
+            </a:extLst>
+          </p:cNvPr>
+          <p:cNvSpPr>
+            <a:spLocks noGrp="1"/>
+          </p:cNvSpPr>
+          <p:nvPr>
+            <p:ph type="title"/>
+          </p:nvPr>
+        </p:nvSpPr>
+        <p:spPr/>
+        <p:txBody>
+          <a:bodyPr/>
+          <a:lstStyle/>
+          <a:p>
+            <a:r>
+              <a:rPr lang="en-US" dirty="0"/>
+              <a:t>General Announcements (cont.)</a:t>
+            </a:r>
+          </a:p>
+        </p:txBody>
+      </p:sp>
+      <p:sp>
+        <p:nvSpPr>
+          <p:cNvPr id="3" name="Content Placeholder 2">
+            <a:extLst>
+              <a:ext uri="{FF2B5EF4-FFF2-40B4-BE49-F238E27FC236}">
+                <a16:creationId xmlns:a16="http://schemas.microsoft.com/office/drawing/2014/main" id="{4334EDB9-2CE2-48D5-AACA-BEBFD4215A6B}"/>
+              </a:ext>
+            </a:extLst>
+          </p:cNvPr>
+          <p:cNvSpPr>
+            <a:spLocks noGrp="1"/>
+          </p:cNvSpPr>
+          <p:nvPr>
+            <p:ph idx="1"/>
+          </p:nvPr>
+        </p:nvSpPr>
+        <p:spPr/>
+        <p:txBody>
+          <a:bodyPr>
+            <a:normAutofit fontScale="85000" lnSpcReduction="10000"/>
+          </a:bodyPr>
+          <a:lstStyle/>
+          <a:p>
+            <a:r>
+              <a:rPr lang="en-US" dirty="0"/>
+              <a:t>We’re (</a:t>
+            </a:r>
+            <a:r>
+              <a:rPr lang="en-US" dirty="0" err="1"/>
+              <a:t>wilkie</a:t>
+            </a:r>
+            <a:r>
+              <a:rPr lang="en-US" dirty="0"/>
+              <a:t> and the other TAs) are trying to restructure the class so it’s not so intense.</a:t>
+            </a:r>
+          </a:p>
+          <a:p>
+            <a:endParaRPr lang="en-US" dirty="0"/>
+          </a:p>
+          <a:p>
+            <a:r>
+              <a:rPr lang="en-US" dirty="0"/>
+              <a:t>We are planning on tossing the </a:t>
+            </a:r>
+            <a:r>
+              <a:rPr lang="en-US" b="1" dirty="0"/>
+              <a:t>cache lab</a:t>
+            </a:r>
+            <a:r>
+              <a:rPr lang="en-US" dirty="0"/>
+              <a:t>, and extending the amount of time you get for the malloc lab.</a:t>
+            </a:r>
+          </a:p>
+          <a:p>
+            <a:endParaRPr lang="en-US" dirty="0"/>
+          </a:p>
+          <a:p>
+            <a:r>
+              <a:rPr lang="en-US" dirty="0"/>
+              <a:t>I have talked to </a:t>
+            </a:r>
+            <a:r>
+              <a:rPr lang="en-US" dirty="0" err="1"/>
+              <a:t>Dr.Petrucci</a:t>
+            </a:r>
+            <a:r>
+              <a:rPr lang="en-US" dirty="0"/>
+              <a:t> regarding the constraints of the </a:t>
+            </a:r>
+            <a:r>
+              <a:rPr lang="en-US" b="1" dirty="0"/>
+              <a:t>malloc lab</a:t>
+            </a:r>
+            <a:r>
+              <a:rPr lang="en-US" dirty="0"/>
+              <a:t>, and now you will no longer have to worry about having malloc run in O(n) time and space, neither will you need to worry about caching pointers for a Quick Fit allocation scheme.</a:t>
+            </a:r>
+          </a:p>
+        </p:txBody>
+      </p:sp>
+    </p:spTree>
+    <p:extLst>
+      <p:ext uri="{BB962C8B-B14F-4D97-AF65-F5344CB8AC3E}">
+        <p14:creationId xmlns:p14="http://schemas.microsoft.com/office/powerpoint/2010/main" val="1171435148"/>
+      </p:ext>
+    </p:extLst>
+  </p:cSld>
+  <p:clrMapOvr>
+    <a:masterClrMapping/>
+  </p:clrMapOvr>
+</p:sld>
+</file>
+
+<file path=ppt/slides/slide30.xml><?xml version="1.0" encoding="utf-8"?>
+<p:sld xmlns:a="http://schemas.openxmlformats.org/drawingml/2006/main" xmlns:r="http://schemas.openxmlformats.org/officeDocument/2006/relationships" xmlns:p="http://schemas.openxmlformats.org/presentationml/2006/main">
+  <p:cSld>
     <p:bg>
       <p:bgPr>
         <a:solidFill>
@@ -12687,144 +13007,6 @@
       </p:transition>
     </mc:Fallback>
   </mc:AlternateContent>
-</p:sld>
-</file>
-
-<file path=ppt/slides/slide3.xml><?xml version="1.0" encoding="utf-8"?>
-<p:sld xmlns:a="http://schemas.openxmlformats.org/drawingml/2006/main" xmlns:r="http://schemas.openxmlformats.org/officeDocument/2006/relationships" xmlns:p="http://schemas.openxmlformats.org/presentationml/2006/main">
-  <p:cSld>
-    <p:spTree>
-      <p:nvGrpSpPr>
-        <p:cNvPr id="1" name=""/>
-        <p:cNvGrpSpPr/>
-        <p:nvPr/>
-      </p:nvGrpSpPr>
-      <p:grpSpPr>
-        <a:xfrm>
-          <a:off x="0" y="0"/>
-          <a:ext cx="0" cy="0"/>
-          <a:chOff x="0" y="0"/>
-          <a:chExt cx="0" cy="0"/>
-        </a:xfrm>
-      </p:grpSpPr>
-      <p:sp>
-        <p:nvSpPr>
-          <p:cNvPr id="2" name="Title 1">
-            <a:extLst>
-              <a:ext uri="{FF2B5EF4-FFF2-40B4-BE49-F238E27FC236}">
-                <a16:creationId xmlns:a16="http://schemas.microsoft.com/office/drawing/2014/main" id="{3A5B0D9C-36C9-4F34-A141-C3F7500BAE08}"/>
-              </a:ext>
-            </a:extLst>
-          </p:cNvPr>
-          <p:cNvSpPr>
-            <a:spLocks noGrp="1"/>
-          </p:cNvSpPr>
-          <p:nvPr>
-            <p:ph type="title"/>
-          </p:nvPr>
-        </p:nvSpPr>
-        <p:spPr/>
-        <p:txBody>
-          <a:bodyPr/>
-          <a:lstStyle/>
-          <a:p>
-            <a:r>
-              <a:rPr lang="en-US" dirty="0"/>
-              <a:t>General Announcements (cont.)</a:t>
-            </a:r>
-          </a:p>
-        </p:txBody>
-      </p:sp>
-      <p:sp>
-        <p:nvSpPr>
-          <p:cNvPr id="3" name="Content Placeholder 2">
-            <a:extLst>
-              <a:ext uri="{FF2B5EF4-FFF2-40B4-BE49-F238E27FC236}">
-                <a16:creationId xmlns:a16="http://schemas.microsoft.com/office/drawing/2014/main" id="{4334EDB9-2CE2-48D5-AACA-BEBFD4215A6B}"/>
-              </a:ext>
-            </a:extLst>
-          </p:cNvPr>
-          <p:cNvSpPr>
-            <a:spLocks noGrp="1"/>
-          </p:cNvSpPr>
-          <p:nvPr>
-            <p:ph idx="1"/>
-          </p:nvPr>
-        </p:nvSpPr>
-        <p:spPr/>
-        <p:txBody>
-          <a:bodyPr>
-            <a:normAutofit fontScale="85000" lnSpcReduction="10000"/>
-          </a:bodyPr>
-          <a:lstStyle/>
-          <a:p>
-            <a:r>
-              <a:rPr lang="en-US" dirty="0"/>
-              <a:t>We’re (</a:t>
-            </a:r>
-            <a:r>
-              <a:rPr lang="en-US" dirty="0" err="1"/>
-              <a:t>wilkie</a:t>
-            </a:r>
-            <a:r>
-              <a:rPr lang="en-US" dirty="0"/>
-              <a:t> and the other TAs) are trying to restructure the class so it’s not so intense.</a:t>
-            </a:r>
-          </a:p>
-          <a:p>
-            <a:endParaRPr lang="en-US" dirty="0"/>
-          </a:p>
-          <a:p>
-            <a:r>
-              <a:rPr lang="en-US" dirty="0"/>
-              <a:t>We are planning on tossing the </a:t>
-            </a:r>
-            <a:r>
-              <a:rPr lang="en-US" b="1" dirty="0"/>
-              <a:t>cache lab</a:t>
-            </a:r>
-            <a:r>
-              <a:rPr lang="en-US" dirty="0"/>
-              <a:t>, and extending the amount of time you get for the malloc lab.</a:t>
-            </a:r>
-          </a:p>
-          <a:p>
-            <a:endParaRPr lang="en-US" dirty="0"/>
-          </a:p>
-          <a:p>
-            <a:r>
-              <a:rPr lang="en-US" dirty="0"/>
-              <a:t>I have talked to </a:t>
-            </a:r>
-            <a:r>
-              <a:rPr lang="en-US" dirty="0" err="1"/>
-              <a:t>Dr.Petrucci</a:t>
-            </a:r>
-            <a:r>
-              <a:rPr lang="en-US" dirty="0"/>
-              <a:t> regarding the constraints of the </a:t>
-            </a:r>
-            <a:r>
-              <a:rPr lang="en-US" b="1" dirty="0"/>
-              <a:t>malloc lab</a:t>
-            </a:r>
-            <a:r>
-              <a:rPr lang="en-US" dirty="0"/>
-              <a:t>, and now you will no longer have to worry about having malloc run in O(n) time and space, neither will you need to worry about caching pointers for a Quick Fit allocation scheme.</a:t>
-            </a:r>
-          </a:p>
-        </p:txBody>
-      </p:sp>
-    </p:spTree>
-    <p:extLst>
-      <p:ext uri="{BB962C8B-B14F-4D97-AF65-F5344CB8AC3E}">
-        <p14:creationId xmlns:p14="http://schemas.microsoft.com/office/powerpoint/2010/main" val="1171435148"/>
-      </p:ext>
-    </p:extLst>
-  </p:cSld>
-  <p:clrMapOvr>
-    <a:masterClrMapping/>
-  </p:clrMapOvr>
 </p:sld>
 </file>
 
